--- a/docs/presentation/MediPlan-Presentation-Finale.pptx
+++ b/docs/presentation/MediPlan-Presentation-Finale.pptx
@@ -705,7 +705,7 @@
           <a:p/>
           <a:p>
             <a:r>
-              <a:t>Le test dont je suis le plus content, c'est celui de la double réservation. Nous ne testons pas seulement que ça marche : nous lançons deux réservations en même temps sur le même créneau et nous vérifions qu'une seule passe. C'est le test qui prouve que la garantie tient sous charge.</a:t>
+              <a:t>La vérification dont je suis le plus content n'est pas dans cette suite, et je veux être précis là-dessus. Pour la double réservation, nous avons lancé deux réservations en même temps sur le même créneau, sur l'application en ligne : une passe, l'autre est refusée avec un 409. C'est reproductible, mais c'est manuel — nos tests serveur simulent la base de données, donc ils ne peuvent pas prouver un comportement qui appartient à PostgreSQL. Le rendre automatique demanderait une vraie base dans la chaîne d'intégration : c'est la première ligne de nos pistes d'amélioration.</a:t>
             </a:r>
           </a:p>
           <a:p/>
@@ -1081,7 +1081,7 @@
           <a:p/>
           <a:p>
             <a:r>
-              <a:t>LARBI : « J'ai porté le patient léger, la prise de rendez-vous et les statistiques. Ma difficulté a été de garantir qu'un créneau ne soit jamais pris deux fois. La solution a été de sortir cette garantie du code pour la mettre dans la base. »</a:t>
+              <a:t>LARBI : « J'ai porté le patient léger, la prise de rendez-vous par la réception et les statistiques. Ma difficulté a été de garantir qu'un créneau ne soit jamais pris deux fois. Vérifier dans le code ne suffit pas : entre la vérification et l'écriture, une autre requête peut passer. J'ai donc sorti la garantie du code pour la poser en base, comme contrainte d'unicité sur le créneau. Souleymane l'a ensuite transformée en index partiel, pour qu'une annulation libère le créneau. »</a:t>
             </a:r>
           </a:p>
           <a:p/>
@@ -1186,7 +1186,7 @@
           </a:p>
           <a:p>
             <a:r>
-              <a:t>· Doubles réservations ? → index unique partiel, PostgreSQL tranche, testé en concurrence (Larbi)</a:t>
+              <a:t>· Doubles réservations ? → index unique partiel, PostgreSQL tranche ; vérifié en concurrence sur l'app en ligne, 201 + 409. Manuel, pas automatisé (Larbi)</a:t>
             </a:r>
           </a:p>
           <a:p>
@@ -8213,26 +8213,64 @@
                 </a:solidFill>
                 <a:latin typeface="Calibri"/>
               </a:rPr>
-              <a:t>•  Le cas critique testé en concurrence : deux réservations</a:t>
-            </a:r>
-          </a:p>
-          <a:p>
-            <a:pPr algn="l">
-              <a:spcBef>
-                <a:spcPts val="0"/>
-              </a:spcBef>
-              <a:spcAft>
-                <a:spcPts val="300"/>
-              </a:spcAft>
-            </a:pPr>
-            <a:r>
-              <a:rPr sz="1300" b="0">
-                <a:solidFill>
-                  <a:srgbClr val="404040"/>
-                </a:solidFill>
-                <a:latin typeface="Calibri"/>
-              </a:rPr>
-              <a:t>•     simultanées sur le même créneau, une seule passe</a:t>
+              <a:t>•  Le cas critique vérifié en concurrence sur l'application en</a:t>
+            </a:r>
+          </a:p>
+          <a:p>
+            <a:pPr algn="l">
+              <a:spcBef>
+                <a:spcPts val="0"/>
+              </a:spcBef>
+              <a:spcAft>
+                <a:spcPts val="300"/>
+              </a:spcAft>
+            </a:pPr>
+            <a:r>
+              <a:rPr sz="1300" b="0">
+                <a:solidFill>
+                  <a:srgbClr val="404040"/>
+                </a:solidFill>
+                <a:latin typeface="Calibri"/>
+              </a:rPr>
+              <a:t>•     ligne : deux réservations simultanées, une seule passe.</a:t>
+            </a:r>
+          </a:p>
+          <a:p>
+            <a:pPr algn="l">
+              <a:spcBef>
+                <a:spcPts val="0"/>
+              </a:spcBef>
+              <a:spcAft>
+                <a:spcPts val="300"/>
+              </a:spcAft>
+            </a:pPr>
+            <a:r>
+              <a:rPr sz="1300" b="0">
+                <a:solidFill>
+                  <a:srgbClr val="404040"/>
+                </a:solidFill>
+                <a:latin typeface="Calibri"/>
+              </a:rPr>
+              <a:t>•     Vérification manuelle et reproductible — nos tests backend</a:t>
+            </a:r>
+          </a:p>
+          <a:p>
+            <a:pPr algn="l">
+              <a:spcBef>
+                <a:spcPts val="0"/>
+              </a:spcBef>
+              <a:spcAft>
+                <a:spcPts val="300"/>
+              </a:spcAft>
+            </a:pPr>
+            <a:r>
+              <a:rPr sz="1300" b="0">
+                <a:solidFill>
+                  <a:srgbClr val="404040"/>
+                </a:solidFill>
+                <a:latin typeface="Calibri"/>
+              </a:rPr>
+              <a:t>•     simulent la base, ils ne peuvent pas le prouver seuls</a:t>
             </a:r>
           </a:p>
           <a:p>
@@ -13040,26 +13078,64 @@
                 </a:solidFill>
                 <a:latin typeface="Calibri"/>
               </a:rPr>
-              <a:t>•     4 rôles, design system,</a:t>
-            </a:r>
-          </a:p>
-          <a:p>
-            <a:pPr algn="l">
-              <a:spcBef>
-                <a:spcPts val="0"/>
-              </a:spcBef>
-              <a:spcAft>
-                <a:spcPts val="300"/>
-              </a:spcAft>
-            </a:pPr>
-            <a:r>
-              <a:rPr sz="1300" b="0">
-                <a:solidFill>
-                  <a:srgbClr val="404040"/>
-                </a:solidFill>
-                <a:latin typeface="Calibri"/>
-              </a:rPr>
-              <a:t>•     déploiement Azure en Bicep</a:t>
+              <a:t>•     4 rôles, design system, passage</a:t>
+            </a:r>
+          </a:p>
+          <a:p>
+            <a:pPr algn="l">
+              <a:spcBef>
+                <a:spcPts val="0"/>
+              </a:spcBef>
+              <a:spcAft>
+                <a:spcPts val="300"/>
+              </a:spcAft>
+            </a:pPr>
+            <a:r>
+              <a:rPr sz="1300" b="0">
+                <a:solidFill>
+                  <a:srgbClr val="404040"/>
+                </a:solidFill>
+                <a:latin typeface="Calibri"/>
+              </a:rPr>
+              <a:t>•     de la contrainte d'unicité à un</a:t>
+            </a:r>
+          </a:p>
+          <a:p>
+            <a:pPr algn="l">
+              <a:spcBef>
+                <a:spcPts val="0"/>
+              </a:spcBef>
+              <a:spcAft>
+                <a:spcPts val="300"/>
+              </a:spcAft>
+            </a:pPr>
+            <a:r>
+              <a:rPr sz="1300" b="0">
+                <a:solidFill>
+                  <a:srgbClr val="404040"/>
+                </a:solidFill>
+                <a:latin typeface="Calibri"/>
+              </a:rPr>
+              <a:t>•     index PARTIEL (qui rend possible</a:t>
+            </a:r>
+          </a:p>
+          <a:p>
+            <a:pPr algn="l">
+              <a:spcBef>
+                <a:spcPts val="0"/>
+              </a:spcBef>
+              <a:spcAft>
+                <a:spcPts val="300"/>
+              </a:spcAft>
+            </a:pPr>
+            <a:r>
+              <a:rPr sz="1300" b="0">
+                <a:solidFill>
+                  <a:srgbClr val="404040"/>
+                </a:solidFill>
+                <a:latin typeface="Calibri"/>
+              </a:rPr>
+              <a:t>•     l'annulation), déploiement Azure</a:t>
             </a:r>
           </a:p>
           <a:p>
@@ -13775,45 +13851,45 @@
                 </a:solidFill>
                 <a:latin typeface="Calibri"/>
               </a:rPr>
-              <a:t>•     rendez-vous et index anti-double-</a:t>
-            </a:r>
-          </a:p>
-          <a:p>
-            <a:pPr algn="l">
-              <a:spcBef>
-                <a:spcPts val="0"/>
-              </a:spcBef>
-              <a:spcAft>
-                <a:spcPts val="300"/>
-              </a:spcAft>
-            </a:pPr>
-            <a:r>
-              <a:rPr sz="1300" b="0">
-                <a:solidFill>
-                  <a:srgbClr val="404040"/>
-                </a:solidFill>
-                <a:latin typeface="Calibri"/>
-              </a:rPr>
-              <a:t>•     réservation, tableau de bord et</a:t>
-            </a:r>
-          </a:p>
-          <a:p>
-            <a:pPr algn="l">
-              <a:spcBef>
-                <a:spcPts val="0"/>
-              </a:spcBef>
-              <a:spcAft>
-                <a:spcPts val="300"/>
-              </a:spcAft>
-            </a:pPr>
-            <a:r>
-              <a:rPr sz="1300" b="0">
-                <a:solidFill>
-                  <a:srgbClr val="404040"/>
-                </a:solidFill>
-                <a:latin typeface="Calibri"/>
-              </a:rPr>
-              <a:t>•     statistiques</a:t>
+              <a:t>•     rendez-vous (entités, migration,</a:t>
+            </a:r>
+          </a:p>
+          <a:p>
+            <a:pPr algn="l">
+              <a:spcBef>
+                <a:spcPts val="0"/>
+              </a:spcBef>
+              <a:spcAft>
+                <a:spcPts val="300"/>
+              </a:spcAft>
+            </a:pPr>
+            <a:r>
+              <a:rPr sz="1300" b="0">
+                <a:solidFill>
+                  <a:srgbClr val="404040"/>
+                </a:solidFill>
+                <a:latin typeface="Calibri"/>
+              </a:rPr>
+              <a:t>•     contrainte d'unicité), tableau de</a:t>
+            </a:r>
+          </a:p>
+          <a:p>
+            <a:pPr algn="l">
+              <a:spcBef>
+                <a:spcPts val="0"/>
+              </a:spcBef>
+              <a:spcAft>
+                <a:spcPts val="300"/>
+              </a:spcAft>
+            </a:pPr>
+            <a:r>
+              <a:rPr sz="1300" b="0">
+                <a:solidFill>
+                  <a:srgbClr val="404040"/>
+                </a:solidFill>
+                <a:latin typeface="Calibri"/>
+              </a:rPr>
+              <a:t>•     bord et statistiques</a:t>
             </a:r>
           </a:p>
           <a:p>
@@ -13908,45 +13984,45 @@
                 </a:solidFill>
                 <a:latin typeface="Calibri"/>
               </a:rPr>
-              <a:t>•  Solution : déplacer la garantie du</a:t>
-            </a:r>
-          </a:p>
-          <a:p>
-            <a:pPr algn="l">
-              <a:spcBef>
-                <a:spcPts val="0"/>
-              </a:spcBef>
-              <a:spcAft>
-                <a:spcPts val="300"/>
-              </a:spcAft>
-            </a:pPr>
-            <a:r>
-              <a:rPr sz="1300" b="0">
-                <a:solidFill>
-                  <a:srgbClr val="404040"/>
-                </a:solidFill>
-                <a:latin typeface="Calibri"/>
-              </a:rPr>
-              <a:t>•     code vers la base, avec un index</a:t>
-            </a:r>
-          </a:p>
-          <a:p>
-            <a:pPr algn="l">
-              <a:spcBef>
-                <a:spcPts val="0"/>
-              </a:spcBef>
-              <a:spcAft>
-                <a:spcPts val="300"/>
-              </a:spcAft>
-            </a:pPr>
-            <a:r>
-              <a:rPr sz="1300" b="0">
-                <a:solidFill>
-                  <a:srgbClr val="404040"/>
-                </a:solidFill>
-                <a:latin typeface="Calibri"/>
-              </a:rPr>
-              <a:t>•     unique partiel</a:t>
+              <a:t>•  Solution : sortir la garantie du code</a:t>
+            </a:r>
+          </a:p>
+          <a:p>
+            <a:pPr algn="l">
+              <a:spcBef>
+                <a:spcPts val="0"/>
+              </a:spcBef>
+              <a:spcAft>
+                <a:spcPts val="300"/>
+              </a:spcAft>
+            </a:pPr>
+            <a:r>
+              <a:rPr sz="1300" b="0">
+                <a:solidFill>
+                  <a:srgbClr val="404040"/>
+                </a:solidFill>
+                <a:latin typeface="Calibri"/>
+              </a:rPr>
+              <a:t>•     pour la poser en base, comme</a:t>
+            </a:r>
+          </a:p>
+          <a:p>
+            <a:pPr algn="l">
+              <a:spcBef>
+                <a:spcPts val="0"/>
+              </a:spcBef>
+              <a:spcAft>
+                <a:spcPts val="300"/>
+              </a:spcAft>
+            </a:pPr>
+            <a:r>
+              <a:rPr sz="1300" b="0">
+                <a:solidFill>
+                  <a:srgbClr val="404040"/>
+                </a:solidFill>
+                <a:latin typeface="Calibri"/>
+              </a:rPr>
+              <a:t>•     contrainte d'unicité sur le créneau</a:t>
             </a:r>
           </a:p>
         </p:txBody>
@@ -21518,7 +21594,7 @@
                 </a:solidFill>
                 <a:latin typeface="Calibri"/>
               </a:rPr>
-              <a:t>•  Le comportement est testé en conditions de concurrence — deux réservations simultanées, une seule passe.</a:t>
+              <a:t>•  Vérifié sur l'application déployée : deux réservations lancées en même temps sur le même créneau — une passe (201), l'autre est refusée (409).</a:t>
             </a:r>
           </a:p>
           <a:p>

--- a/docs/presentation/MediPlan-Presentation-Finale.pptx
+++ b/docs/presentation/MediPlan-Presentation-Finale.pptx
@@ -699,7 +699,7 @@
           <a:p/>
           <a:p>
             <a:r>
-              <a:t>« Nous avons 186 tests automatisés : 57 côté serveur, 129 côté interface. Ils tournent à chaque push, et une pull request dont la CI est rouge n'est pas fusionnée.</a:t>
+              <a:t>« Nous avons 199 tests automatisés : 67 côté serveur, 132 côté interface. Ils tournent à chaque push, et une pull request dont la CI est rouge n'est pas fusionnée.</a:t>
             </a:r>
           </a:p>
           <a:p/>
@@ -1163,7 +1163,7 @@
           <a:p/>
           <a:p>
             <a:r>
-              <a:t>« Pour résumer : huit fonctionnalités livrées et intégrées, 186 tests verts, une application en ligne pour environ zéro dollar par mois, et une infrastructure entièrement décrite en code — n'importe qui peut la redéployer d'une commande.</a:t>
+              <a:t>« Pour résumer : neuf fonctionnalités livrées et intégrées, 199 tests verts, une application en ligne pour environ zéro dollar par mois, et une infrastructure entièrement décrite en code — n'importe qui peut la redéployer d'une commande.</a:t>
             </a:r>
           </a:p>
           <a:p/>
@@ -1191,7 +1191,12 @@
           </a:p>
           <a:p>
             <a:r>
-              <a:t>· Pourquoi le patient ne réserve pas ? → il appelle, c'est le flux réel (Souleymane)</a:t>
+              <a:t>· Le patient peut-il réserver seul ? → oui, et il peut aussi appeler ; deux canaux, un seul agenda, et la base interdit le doublon entre les deux (Souleymane)</a:t>
+            </a:r>
+          </a:p>
+          <a:p>
+            <a:r>
+              <a:t>· Pourquoi le patient ne peut-il pas annuler ? → l'annulation suppose un délai minimum (UC-07) que nous n'avons pas implémenté ; nous n'avons pas voulu livrer l'une sans l'autre (Souleymane)</a:t>
             </a:r>
           </a:p>
           <a:p>
@@ -1211,7 +1216,7 @@
           </a:p>
           <a:p>
             <a:r>
-              <a:t>· Comment testez-vous ? → 186 tests, CI bloquante sur build et tests (Larbi)</a:t>
+              <a:t>· Comment testez-vous ? → 199 tests, CI bloquante sur build et tests (Larbi)</a:t>
             </a:r>
           </a:p>
         </p:txBody>
@@ -1399,7 +1404,7 @@
           <a:p/>
           <a:p>
             <a:r>
-              <a:t>Si on demande : « pourquoi le patient ne réserve pas lui-même ? » → « le libre-service existe pour l'inscription patient, mais la prise de RDV passe par la réception : c'est ce que fait réellement une petite clinique ».</a:t>
+              <a:t>Si on demande : « et le patient, il fait quoi ? » → « les deux canaux existent. Celui qui appelle est pris en charge par la réception, sans jamais avoir à créer de compte — c'est le patient léger. Celui qui préfère réserver seul le fait depuis son espace. Les deux puisent dans le même agenda, et la base interdit qu'une place soit donnée deux fois. »</a:t>
             </a:r>
           </a:p>
         </p:txBody>
@@ -1970,27 +1975,42 @@
           </a:p>
           <a:p>
             <a:r>
-              <a:t>4. Nouveau rendez-vous → créer le patient → réserver</a:t>
-            </a:r>
-          </a:p>
-          <a:p>
-            <a:r>
-              <a:t>5. Flux du jour → Arrive → Consultation → Termine</a:t>
-            </a:r>
-          </a:p>
-          <a:p>
-            <a:r>
-              <a:t>6. Menu ⋯ → Annuler → motif obligatoire</a:t>
-            </a:r>
-          </a:p>
-          <a:p>
-            <a:r>
-              <a:t>7. Export CSV → ouvrir le fichier téléchargé</a:t>
-            </a:r>
-          </a:p>
-          <a:p>
-            <a:r>
-              <a:t>8. Déconnexion → doctor.demo / Doct0r!Secret → montrer le menu réduit ET la cloche</a:t>
+              <a:t>4. Déconnexion → patient.demo / Pat1ent!Secret → Mes rendez-vous →</a:t>
+            </a:r>
+          </a:p>
+          <a:p>
+            <a:r>
+              <a:t>   Prendre un rendez-vous → réserver le PREMIER créneau de la plage</a:t>
+            </a:r>
+          </a:p>
+          <a:p>
+            <a:r>
+              <a:t>5. Retour admin.demo → Nouveau rendez-vous → MARQUER UN TEMPS :</a:t>
+            </a:r>
+          </a:p>
+          <a:p>
+            <a:r>
+              <a:t>   le créneau pris en ligne n'est plus dans la liste → réserver le suivant</a:t>
+            </a:r>
+          </a:p>
+          <a:p>
+            <a:r>
+              <a:t>6. Flux du jour → Arrive → Consultation → Termine</a:t>
+            </a:r>
+          </a:p>
+          <a:p>
+            <a:r>
+              <a:t>7. Menu ⋯ → Annuler → motif obligatoire</a:t>
+            </a:r>
+          </a:p>
+          <a:p>
+            <a:r>
+              <a:t>8. Export CSV → ouvrir le fichier téléchargé</a:t>
+            </a:r>
+          </a:p>
+          <a:p>
+            <a:r>
+              <a:t>9. Déconnexion → doctor.demo / Doct0r!Secret → montrer le menu réduit ET la cloche</a:t>
             </a:r>
           </a:p>
           <a:p/>
@@ -7692,7 +7712,7 @@
                 </a:solidFill>
                 <a:latin typeface="Calibri"/>
               </a:rPr>
-              <a:t>186</a:t>
+              <a:t>199</a:t>
             </a:r>
           </a:p>
           <a:p>
@@ -8514,7 +8534,7 @@
                 </a:solidFill>
                 <a:latin typeface="Calibri"/>
               </a:rPr>
-              <a:t>•  Les 186 tests passent</a:t>
+              <a:t>•  Les 199 tests passent</a:t>
             </a:r>
           </a:p>
           <a:p>
@@ -12352,7 +12372,26 @@
                 </a:solidFill>
                 <a:latin typeface="Calibri"/>
               </a:rPr>
-              <a:t>•  Portail patient en libre-service</a:t>
+              <a:t>•  Annulation par le patient, avec</a:t>
+            </a:r>
+          </a:p>
+          <a:p>
+            <a:pPr algn="l">
+              <a:spcBef>
+                <a:spcPts val="0"/>
+              </a:spcBef>
+              <a:spcAft>
+                <a:spcPts val="300"/>
+              </a:spcAft>
+            </a:pPr>
+            <a:r>
+              <a:rPr sz="1300" b="0">
+                <a:solidFill>
+                  <a:srgbClr val="404040"/>
+                </a:solidFill>
+                <a:latin typeface="Calibri"/>
+              </a:rPr>
+              <a:t>•     son délai minimum</a:t>
             </a:r>
           </a:p>
         </p:txBody>
@@ -14288,7 +14327,7 @@
                 </a:solidFill>
                 <a:latin typeface="Calibri"/>
               </a:rPr>
-              <a:t>8</a:t>
+              <a:t>9</a:t>
             </a:r>
           </a:p>
           <a:p>
@@ -14393,7 +14432,7 @@
                 </a:solidFill>
                 <a:latin typeface="Calibri"/>
               </a:rPr>
-              <a:t>186</a:t>
+              <a:t>199</a:t>
             </a:r>
           </a:p>
           <a:p>
@@ -22095,7 +22134,7 @@
                 </a:solidFill>
                 <a:latin typeface="Calibri"/>
               </a:rPr>
-              <a:t>•  3.  Le Dr Bergeron publie une plage du matin —</a:t>
+              <a:t>•  3.  La Dre Bergeron publie une plage du matin —</a:t>
             </a:r>
           </a:p>
           <a:p>
@@ -22133,45 +22172,83 @@
                 </a:solidFill>
                 <a:latin typeface="Calibri"/>
               </a:rPr>
-              <a:t>•  4.  Un patient appelle : je le crée et je réserve</a:t>
-            </a:r>
-          </a:p>
-          <a:p>
-            <a:pPr algn="l">
-              <a:spcBef>
-                <a:spcPts val="0"/>
-              </a:spcBef>
-              <a:spcAft>
-                <a:spcPts val="300"/>
-              </a:spcAft>
-            </a:pPr>
-            <a:r>
-              <a:rPr sz="1300" b="0">
-                <a:solidFill>
-                  <a:srgbClr val="404040"/>
-                </a:solidFill>
-                <a:latin typeface="Calibri"/>
-              </a:rPr>
-              <a:t>•  5.  Le flux du jour : arrivé → en consultation → terminé</a:t>
-            </a:r>
-          </a:p>
-          <a:p>
-            <a:pPr algn="l">
-              <a:spcBef>
-                <a:spcPts val="0"/>
-              </a:spcBef>
-              <a:spcAft>
-                <a:spcPts val="300"/>
-              </a:spcAft>
-            </a:pPr>
-            <a:r>
-              <a:rPr sz="1300" b="0">
-                <a:solidFill>
-                  <a:srgbClr val="404040"/>
-                </a:solidFill>
-                <a:latin typeface="Calibri"/>
-              </a:rPr>
-              <a:t>•  6.  Un patient annule : motif obligatoire,</a:t>
+              <a:t>•  4.  Une patiente réserve seule, depuis son espace</a:t>
+            </a:r>
+          </a:p>
+          <a:p>
+            <a:pPr algn="l">
+              <a:spcBef>
+                <a:spcPts val="0"/>
+              </a:spcBef>
+              <a:spcAft>
+                <a:spcPts val="300"/>
+              </a:spcAft>
+            </a:pPr>
+            <a:r>
+              <a:rPr sz="1300" b="0">
+                <a:solidFill>
+                  <a:srgbClr val="404040"/>
+                </a:solidFill>
+                <a:latin typeface="Calibri"/>
+              </a:rPr>
+              <a:t>•  5.  Un autre patient appelle : le créneau qu'elle a pris</a:t>
+            </a:r>
+          </a:p>
+          <a:p>
+            <a:pPr algn="l">
+              <a:spcBef>
+                <a:spcPts val="0"/>
+              </a:spcBef>
+              <a:spcAft>
+                <a:spcPts val="300"/>
+              </a:spcAft>
+            </a:pPr>
+            <a:r>
+              <a:rPr sz="1300" b="0">
+                <a:solidFill>
+                  <a:srgbClr val="404040"/>
+                </a:solidFill>
+                <a:latin typeface="Calibri"/>
+              </a:rPr>
+              <a:t>•       a disparu de ma liste — je le crée et je réserve</a:t>
+            </a:r>
+          </a:p>
+          <a:p>
+            <a:pPr algn="l">
+              <a:spcBef>
+                <a:spcPts val="0"/>
+              </a:spcBef>
+              <a:spcAft>
+                <a:spcPts val="300"/>
+              </a:spcAft>
+            </a:pPr>
+            <a:r>
+              <a:rPr sz="1300" b="0">
+                <a:solidFill>
+                  <a:srgbClr val="404040"/>
+                </a:solidFill>
+                <a:latin typeface="Calibri"/>
+              </a:rPr>
+              <a:t>•  6.  Le flux du jour : arrivé → en consultation → terminé</a:t>
+            </a:r>
+          </a:p>
+          <a:p>
+            <a:pPr algn="l">
+              <a:spcBef>
+                <a:spcPts val="0"/>
+              </a:spcBef>
+              <a:spcAft>
+                <a:spcPts val="300"/>
+              </a:spcAft>
+            </a:pPr>
+            <a:r>
+              <a:rPr sz="1300" b="0">
+                <a:solidFill>
+                  <a:srgbClr val="404040"/>
+                </a:solidFill>
+                <a:latin typeface="Calibri"/>
+              </a:rPr>
+              <a:t>•  7.  Un patient annule : motif obligatoire,</a:t>
             </a:r>
           </a:p>
           <a:p>
@@ -22209,26 +22286,26 @@
                 </a:solidFill>
                 <a:latin typeface="Calibri"/>
               </a:rPr>
-              <a:t>•  7.  J'exporte les rendez-vous du mois en CSV</a:t>
-            </a:r>
-          </a:p>
-          <a:p>
-            <a:pPr algn="l">
-              <a:spcBef>
-                <a:spcPts val="0"/>
-              </a:spcBef>
-              <a:spcAft>
-                <a:spcPts val="300"/>
-              </a:spcAft>
-            </a:pPr>
-            <a:r>
-              <a:rPr sz="1300" b="0">
-                <a:solidFill>
-                  <a:srgbClr val="404040"/>
-                </a:solidFill>
-                <a:latin typeface="Calibri"/>
-              </a:rPr>
-              <a:t>•  8.  Je bascule sur le compte médecin :</a:t>
+              <a:t>•  8.  J'exporte les rendez-vous du mois en CSV</a:t>
+            </a:r>
+          </a:p>
+          <a:p>
+            <a:pPr algn="l">
+              <a:spcBef>
+                <a:spcPts val="0"/>
+              </a:spcBef>
+              <a:spcAft>
+                <a:spcPts val="300"/>
+              </a:spcAft>
+            </a:pPr>
+            <a:r>
+              <a:rPr sz="1300" b="0">
+                <a:solidFill>
+                  <a:srgbClr val="404040"/>
+                </a:solidFill>
+                <a:latin typeface="Calibri"/>
+              </a:rPr>
+              <a:t>•  9.  Je bascule sur le compte médecin :</a:t>
             </a:r>
           </a:p>
           <a:p>
@@ -22865,7 +22942,26 @@
                 </a:solidFill>
                 <a:latin typeface="Calibri"/>
               </a:rPr>
-              <a:t>Réception : admin.demo@mediplan.test    ·    Médecin : doctor.demo@mediplan.test</a:t>
+              <a:t>Réception : admin.demo@mediplan.test    ·    Patiente : patient.demo@mediplan.test</a:t>
+            </a:r>
+          </a:p>
+          <a:p>
+            <a:pPr algn="ctr">
+              <a:spcBef>
+                <a:spcPts val="0"/>
+              </a:spcBef>
+              <a:spcAft>
+                <a:spcPts val="400"/>
+              </a:spcAft>
+            </a:pPr>
+            <a:r>
+              <a:rPr sz="1500" b="0">
+                <a:solidFill>
+                  <a:srgbClr val="9FC8F5"/>
+                </a:solidFill>
+                <a:latin typeface="Calibri"/>
+              </a:rPr>
+              <a:t>Médecin : doctor.demo@mediplan.test</a:t>
             </a:r>
           </a:p>
           <a:p>

--- a/docs/presentation/MediPlan-Presentation-Finale.pptx
+++ b/docs/presentation/MediPlan-Presentation-Finale.pptx
@@ -699,7 +699,7 @@
           <a:p/>
           <a:p>
             <a:r>
-              <a:t>« Nous avons 199 tests automatisés : 67 côté serveur, 132 côté interface. Ils tournent à chaque push, et une pull request dont la CI est rouge n'est pas fusionnée.</a:t>
+              <a:t>« Nous avons 203 tests automatisés : 70 côté serveur, 133 côté interface. Ils tournent à chaque push, et une pull request dont la CI est rouge n'est pas fusionnée.</a:t>
             </a:r>
           </a:p>
           <a:p/>
@@ -1163,7 +1163,7 @@
           <a:p/>
           <a:p>
             <a:r>
-              <a:t>« Pour résumer : neuf fonctionnalités livrées et intégrées, 199 tests verts, une application en ligne pour environ zéro dollar par mois, et une infrastructure entièrement décrite en code — n'importe qui peut la redéployer d'une commande.</a:t>
+              <a:t>« Pour résumer : neuf fonctionnalités livrées et intégrées, 203 tests verts, une application en ligne pour environ zéro dollar par mois, et une infrastructure entièrement décrite en code — n'importe qui peut la redéployer d'une commande.</a:t>
             </a:r>
           </a:p>
           <a:p/>
@@ -1216,7 +1216,7 @@
           </a:p>
           <a:p>
             <a:r>
-              <a:t>· Comment testez-vous ? → 199 tests, CI bloquante sur build et tests (Larbi)</a:t>
+              <a:t>· Comment testez-vous ? → 203 tests, CI bloquante sur build et tests (Larbi)</a:t>
             </a:r>
           </a:p>
         </p:txBody>
@@ -7712,7 +7712,7 @@
                 </a:solidFill>
                 <a:latin typeface="Calibri"/>
               </a:rPr>
-              <a:t>199</a:t>
+              <a:t>203</a:t>
             </a:r>
           </a:p>
           <a:p>
@@ -8534,7 +8534,7 @@
                 </a:solidFill>
                 <a:latin typeface="Calibri"/>
               </a:rPr>
-              <a:t>•  Les 199 tests passent</a:t>
+              <a:t>•  Les 203 tests passent</a:t>
             </a:r>
           </a:p>
           <a:p>
@@ -14432,7 +14432,7 @@
                 </a:solidFill>
                 <a:latin typeface="Calibri"/>
               </a:rPr>
-              <a:t>199</a:t>
+              <a:t>203</a:t>
             </a:r>
           </a:p>
           <a:p>
